--- a/docs/презентация-прототип.pptx
+++ b/docs/презентация-прототип.pptx
@@ -12464,7 +12464,7 @@
                 </a:solidFill>
                 <a:latin typeface="PT Sans"/>
               </a:rPr>
-              <a:t>Отказ оборудования вызревает неделями: медиана вызревания признаков — 29 суток. Чем шире окно, тем плотнее сигнал.</a:t>
+              <a:t>Отказ оборудования вызревает неделями: медиана вызревания признаков — 33 суток. Чем шире окно, тем плотнее сигнал.</a:t>
             </a:r>
           </a:p>
         </p:txBody>

--- a/docs/презентация-прототип.pptx
+++ b/docs/презентация-прототип.pptx
@@ -6501,8 +6501,8 @@
         </p:nvSpPr>
         <p:spPr>
           <a:xfrm>
-            <a:off x="777240" y="5897880"/>
-            <a:ext cx="10637215" cy="731520"/>
+            <a:off x="777240" y="5852160"/>
+            <a:ext cx="10637215" cy="914400"/>
           </a:xfrm>
           <a:prstGeom prst="rect">
             <a:avLst/>
@@ -6517,17 +6517,33 @@
           <a:p>
             <a:pPr algn="l">
               <a:spcAft>
+                <a:spcPts val="400"/>
+              </a:spcAft>
+            </a:pPr>
+            <a:r>
+              <a:rPr sz="1500" b="1" i="0">
+                <a:solidFill>
+                  <a:srgbClr val="0F172A"/>
+                </a:solidFill>
+                <a:latin typeface="PT Sans"/>
+              </a:rPr>
+              <a:t>Сплошной проход по разделам 4–19: 108 проверяемых требований. Выполнено 76, частично 18, не реализовано 11, три — ссылки пакета сдачи.</a:t>
+            </a:r>
+          </a:p>
+          <a:p>
+            <a:pPr algn="l">
+              <a:spcAft>
                 <a:spcPts val="600"/>
               </a:spcAft>
             </a:pPr>
             <a:r>
-              <a:rPr sz="1400" b="0" i="0">
+              <a:rPr sz="1300" b="0" i="0">
                 <a:solidFill>
                   <a:srgbClr val="475569"/>
                 </a:solidFill>
                 <a:latin typeface="PT Sans"/>
               </a:rPr>
-              <a:t>Каждое отклонение имеет письменное основание: ссылку на ответ организаторов или на измерение в данных. Необъяснённое невыполнение снимает решение — объяснённое допустимо, и организаторы это подтвердили.</a:t>
+              <a:t>У каждого пункта в записке стоит оговорка: на чём основано утверждение или почему требование не выполнено. Все одиннадцать невыполненных — это отсутствие внешнего источника, обвязка периметра или сознательное сокращение при недельном сроке.</a:t>
             </a:r>
           </a:p>
         </p:txBody>

--- a/docs/презентация-прототип.pptx
+++ b/docs/презентация-прототип.pptx
@@ -6527,7 +6527,7 @@
                 </a:solidFill>
                 <a:latin typeface="PT Sans"/>
               </a:rPr>
-              <a:t>Сплошной проход по разделам 4–19: 108 проверяемых требований. Выполнено 76, частично 18, не реализовано 11, три — ссылки пакета сдачи.</a:t>
+              <a:t>Сплошной проход по разделам 4–19: 108 проверяемых требований. Выполнено 69, семь работают на эмулированных или суррогатных источниках, 18 частично, 11 не реализовано, три — ссылки пакета.</a:t>
             </a:r>
           </a:p>
           <a:p>

--- a/docs/презентация-прототип.pptx
+++ b/docs/презентация-прототип.pptx
@@ -7211,7 +7211,7 @@
                 </a:solidFill>
                 <a:latin typeface="PT Sans"/>
               </a:rPr>
-              <a:t>Recall 0,5 стоит 713 проверок в сутки — мы это посчитали и показали, вместо того чтобы подогнать метрику под ТЗ.</a:t>
+              <a:t>Recall 0,5 стоит 689 проверок в сутки — мы это посчитали и показали, вместо того чтобы подогнать метрику под ТЗ.</a:t>
             </a:r>
           </a:p>
         </p:txBody>
@@ -10721,7 +10721,7 @@
                           </a:solidFill>
                           <a:latin typeface="PT Sans"/>
                         </a:rPr>
-                        <a:t>Precision@100</a:t>
+                        <a:t>Precision@50</a:t>
                       </a:r>
                     </a:p>
                   </a:txBody>
@@ -10743,7 +10743,7 @@
                           </a:solidFill>
                           <a:latin typeface="PT Sans"/>
                         </a:rPr>
-                        <a:t>0,16</a:t>
+                        <a:t>0,18</a:t>
                       </a:r>
                     </a:p>
                   </a:txBody>
@@ -10765,7 +10765,7 @@
                           </a:solidFill>
                           <a:latin typeface="PT Sans"/>
                         </a:rPr>
-                        <a:t>в 301 раз плотнее случайного выбора</a:t>
+                        <a:t>в 339 раз плотнее случайного выбора</a:t>
                       </a:r>
                     </a:p>
                   </a:txBody>
@@ -11237,7 +11237,7 @@
                           </a:solidFill>
                           <a:latin typeface="PT Sans"/>
                         </a:rPr>
-                        <a:t>65 860</a:t>
+                        <a:t>58 712</a:t>
                       </a:r>
                     </a:p>
                   </a:txBody>
@@ -11259,7 +11259,7 @@
                           </a:solidFill>
                           <a:latin typeface="PT Sans"/>
                         </a:rPr>
-                        <a:t>0,73 %</a:t>
+                        <a:t>0,82 %</a:t>
                       </a:r>
                     </a:p>
                   </a:txBody>
@@ -11281,7 +11281,7 @@
                           </a:solidFill>
                           <a:latin typeface="PT Sans"/>
                         </a:rPr>
-                        <a:t>120</a:t>
+                        <a:t>107</a:t>
                       </a:r>
                     </a:p>
                   </a:txBody>
@@ -11417,7 +11417,7 @@
                           </a:solidFill>
                           <a:latin typeface="PT Sans"/>
                         </a:rPr>
-                        <a:t>390 105</a:t>
+                        <a:t>377 030</a:t>
                       </a:r>
                     </a:p>
                   </a:txBody>
@@ -11439,7 +11439,7 @@
                           </a:solidFill>
                           <a:latin typeface="PT Sans"/>
                         </a:rPr>
-                        <a:t>0,31 %</a:t>
+                        <a:t>0,32 %</a:t>
                       </a:r>
                     </a:p>
                   </a:txBody>
@@ -11461,7 +11461,7 @@
                           </a:solidFill>
                           <a:latin typeface="PT Sans"/>
                         </a:rPr>
-                        <a:t>713</a:t>
+                        <a:t>689</a:t>
                       </a:r>
                     </a:p>
                   </a:txBody>
@@ -11556,7 +11556,7 @@
                 </a:solidFill>
                 <a:latin typeface="PT Sans"/>
               </a:rPr>
-              <a:t>713 проверок в сутки</a:t>
+              <a:t>689 проверок в сутки</a:t>
             </a:r>
           </a:p>
           <a:p>
@@ -11673,7 +11673,7 @@
                 </a:solidFill>
                 <a:latin typeface="PT Sans"/>
               </a:rPr>
-              <a:t>закрывают десятую часть всех отказов сети с плотностью в 58 раз выше случайного обхода. Это нагрузка на смену.</a:t>
+              <a:t>закрывают десятую часть всех отказов сети с плотностью в 60 раз выше случайного обхода. Это нагрузка на смену.</a:t>
             </a:r>
           </a:p>
         </p:txBody>
@@ -11808,7 +11808,7 @@
                 </a:solidFill>
                 <a:latin typeface="PT Sans"/>
               </a:rPr>
-              <a:t>Целевая точность достигается — на другом горизонте</a:t>
+              <a:t>Чем шире окно, тем плотнее сигнал</a:t>
             </a:r>
           </a:p>
         </p:txBody>
@@ -11867,7 +11867,7 @@
         </p:nvGraphicFramePr>
         <p:xfrm>
           <a:off x="777240" y="1783080"/>
-          <a:ext cx="10637213" cy="1554480"/>
+          <a:ext cx="10637212" cy="1554480"/>
         </p:xfrm>
         <a:graphic>
           <a:graphicData uri="http://schemas.openxmlformats.org/drawingml/2006/table">
@@ -11876,11 +11876,12 @@
                 <a:tableStyleId>{5C22544A-7EE6-4342-B048-85BDC9FD1C3A}</a:tableStyleId>
               </a:tblPr>
               <a:tblGrid>
-                <a:gridCol w="1934039"/>
-                <a:gridCol w="1934039"/>
-                <a:gridCol w="2320846"/>
-                <a:gridCol w="1934039"/>
-                <a:gridCol w="2514250"/>
+                <a:gridCol w="1804527"/>
+                <a:gridCol w="1614577"/>
+                <a:gridCol w="1994477"/>
+                <a:gridCol w="1804527"/>
+                <a:gridCol w="1899502"/>
+                <a:gridCol w="1519602"/>
               </a:tblGrid>
               <a:tr h="310896">
                 <a:tc>
@@ -11983,7 +11984,29 @@
                           </a:solidFill>
                           <a:latin typeface="PT Sans"/>
                         </a:rPr>
-                        <a:t>Цель 0,70</a:t>
+                        <a:t>Precision@100</a:t>
+                      </a:r>
+                    </a:p>
+                  </a:txBody>
+                  <a:tcPr marL="73152" marR="73152" marT="27432" marB="27432">
+                    <a:solidFill>
+                      <a:srgbClr val="EEF2F7"/>
+                    </a:solidFill>
+                  </a:tcPr>
+                </a:tc>
+                <a:tc>
+                  <a:txBody>
+                    <a:bodyPr/>
+                    <a:lstStyle/>
+                    <a:p>
+                      <a:r>
+                        <a:rPr sz="1100" b="1">
+                          <a:solidFill>
+                            <a:srgbClr val="0F172A"/>
+                          </a:solidFill>
+                          <a:latin typeface="PT Sans"/>
+                        </a:rPr>
+                        <a:t>PR-AUC</a:t>
                       </a:r>
                     </a:p>
                   </a:txBody>
@@ -12001,7 +12024,7 @@
                     <a:lstStyle/>
                     <a:p>
                       <a:r>
-                        <a:rPr sz="1300" b="0">
+                        <a:rPr sz="1200" b="0">
                           <a:solidFill>
                             <a:srgbClr val="475569"/>
                           </a:solidFill>
@@ -12023,7 +12046,7 @@
                     <a:lstStyle/>
                     <a:p>
                       <a:r>
-                        <a:rPr sz="1300" b="0">
+                        <a:rPr sz="1200" b="0">
                           <a:solidFill>
                             <a:srgbClr val="475569"/>
                           </a:solidFill>
@@ -12045,7 +12068,7 @@
                     <a:lstStyle/>
                     <a:p>
                       <a:r>
-                        <a:rPr sz="1300" b="0">
+                        <a:rPr sz="1200" b="0">
                           <a:solidFill>
                             <a:srgbClr val="475569"/>
                           </a:solidFill>
@@ -12067,7 +12090,7 @@
                     <a:lstStyle/>
                     <a:p>
                       <a:r>
-                        <a:rPr sz="1300" b="0">
+                        <a:rPr sz="1200" b="0">
                           <a:solidFill>
                             <a:srgbClr val="475569"/>
                           </a:solidFill>
@@ -12089,13 +12112,35 @@
                     <a:lstStyle/>
                     <a:p>
                       <a:r>
-                        <a:rPr sz="1300" b="0">
+                        <a:rPr sz="1200" b="0">
                           <a:solidFill>
                             <a:srgbClr val="475569"/>
                           </a:solidFill>
                           <a:latin typeface="PT Sans"/>
                         </a:rPr>
-                        <a:t>нет, потолок 0,18</a:t>
+                        <a:t>0,14</a:t>
+                      </a:r>
+                    </a:p>
+                  </a:txBody>
+                  <a:tcPr marL="73152" marR="73152" marT="27432" marB="27432">
+                    <a:solidFill>
+                      <a:srgbClr val="FFFFFF"/>
+                    </a:solidFill>
+                  </a:tcPr>
+                </a:tc>
+                <a:tc>
+                  <a:txBody>
+                    <a:bodyPr/>
+                    <a:lstStyle/>
+                    <a:p>
+                      <a:r>
+                        <a:rPr sz="1200" b="0">
+                          <a:solidFill>
+                            <a:srgbClr val="475569"/>
+                          </a:solidFill>
+                          <a:latin typeface="PT Sans"/>
+                        </a:rPr>
+                        <a:t>0,0107</a:t>
                       </a:r>
                     </a:p>
                   </a:txBody>
@@ -12113,7 +12158,7 @@
                     <a:lstStyle/>
                     <a:p>
                       <a:r>
-                        <a:rPr sz="1300" b="0">
+                        <a:rPr sz="1200" b="0">
                           <a:solidFill>
                             <a:srgbClr val="475569"/>
                           </a:solidFill>
@@ -12135,7 +12180,7 @@
                     <a:lstStyle/>
                     <a:p>
                       <a:r>
-                        <a:rPr sz="1300" b="0">
+                        <a:rPr sz="1200" b="0">
                           <a:solidFill>
                             <a:srgbClr val="475569"/>
                           </a:solidFill>
@@ -12157,7 +12202,7 @@
                     <a:lstStyle/>
                     <a:p>
                       <a:r>
-                        <a:rPr sz="1300" b="0">
+                        <a:rPr sz="1200" b="0">
                           <a:solidFill>
                             <a:srgbClr val="475569"/>
                           </a:solidFill>
@@ -12179,13 +12224,13 @@
                     <a:lstStyle/>
                     <a:p>
                       <a:r>
-                        <a:rPr sz="1300" b="0">
+                        <a:rPr sz="1200" b="0">
                           <a:solidFill>
                             <a:srgbClr val="475569"/>
                           </a:solidFill>
                           <a:latin typeface="PT Sans"/>
                         </a:rPr>
-                        <a:t>0,08</a:t>
+                        <a:t>0,14</a:t>
                       </a:r>
                     </a:p>
                   </a:txBody>
@@ -12201,13 +12246,35 @@
                     <a:lstStyle/>
                     <a:p>
                       <a:r>
-                        <a:rPr sz="1300" b="0">
+                        <a:rPr sz="1200" b="0">
                           <a:solidFill>
                             <a:srgbClr val="475569"/>
                           </a:solidFill>
                           <a:latin typeface="PT Sans"/>
                         </a:rPr>
-                        <a:t>нет</a:t>
+                        <a:t>0,14</a:t>
+                      </a:r>
+                    </a:p>
+                  </a:txBody>
+                  <a:tcPr marL="73152" marR="73152" marT="27432" marB="27432">
+                    <a:solidFill>
+                      <a:srgbClr val="FFFFFF"/>
+                    </a:solidFill>
+                  </a:tcPr>
+                </a:tc>
+                <a:tc>
+                  <a:txBody>
+                    <a:bodyPr/>
+                    <a:lstStyle/>
+                    <a:p>
+                      <a:r>
+                        <a:rPr sz="1200" b="0">
+                          <a:solidFill>
+                            <a:srgbClr val="475569"/>
+                          </a:solidFill>
+                          <a:latin typeface="PT Sans"/>
+                        </a:rPr>
+                        <a:t>0,0095</a:t>
                       </a:r>
                     </a:p>
                   </a:txBody>
@@ -12225,7 +12292,7 @@
                     <a:lstStyle/>
                     <a:p>
                       <a:r>
-                        <a:rPr sz="1300" b="0">
+                        <a:rPr sz="1200" b="0">
                           <a:solidFill>
                             <a:srgbClr val="475569"/>
                           </a:solidFill>
@@ -12247,7 +12314,7 @@
                     <a:lstStyle/>
                     <a:p>
                       <a:r>
-                        <a:rPr sz="1300" b="0">
+                        <a:rPr sz="1200" b="0">
                           <a:solidFill>
                             <a:srgbClr val="475569"/>
                           </a:solidFill>
@@ -12269,7 +12336,7 @@
                     <a:lstStyle/>
                     <a:p>
                       <a:r>
-                        <a:rPr sz="1300" b="0">
+                        <a:rPr sz="1200" b="0">
                           <a:solidFill>
                             <a:srgbClr val="475569"/>
                           </a:solidFill>
@@ -12291,7 +12358,7 @@
                     <a:lstStyle/>
                     <a:p>
                       <a:r>
-                        <a:rPr sz="1300" b="0">
+                        <a:rPr sz="1200" b="0">
                           <a:solidFill>
                             <a:srgbClr val="475569"/>
                           </a:solidFill>
@@ -12313,13 +12380,35 @@
                     <a:lstStyle/>
                     <a:p>
                       <a:r>
-                        <a:rPr sz="1300" b="0">
+                        <a:rPr sz="1200" b="0">
                           <a:solidFill>
                             <a:srgbClr val="475569"/>
                           </a:solidFill>
                           <a:latin typeface="PT Sans"/>
                         </a:rPr>
-                        <a:t>нет</a:t>
+                        <a:t>0,09</a:t>
+                      </a:r>
+                    </a:p>
+                  </a:txBody>
+                  <a:tcPr marL="73152" marR="73152" marT="27432" marB="27432">
+                    <a:solidFill>
+                      <a:srgbClr val="FFFFFF"/>
+                    </a:solidFill>
+                  </a:tcPr>
+                </a:tc>
+                <a:tc>
+                  <a:txBody>
+                    <a:bodyPr/>
+                    <a:lstStyle/>
+                    <a:p>
+                      <a:r>
+                        <a:rPr sz="1200" b="0">
+                          <a:solidFill>
+                            <a:srgbClr val="475569"/>
+                          </a:solidFill>
+                          <a:latin typeface="PT Sans"/>
+                        </a:rPr>
+                        <a:t>0,0130</a:t>
                       </a:r>
                     </a:p>
                   </a:txBody>
@@ -12337,7 +12426,7 @@
                     <a:lstStyle/>
                     <a:p>
                       <a:r>
-                        <a:rPr sz="1300" b="1">
+                        <a:rPr sz="1200" b="1">
                           <a:solidFill>
                             <a:srgbClr val="0F172A"/>
                           </a:solidFill>
@@ -12359,7 +12448,7 @@
                     <a:lstStyle/>
                     <a:p>
                       <a:r>
-                        <a:rPr sz="1300" b="1">
+                        <a:rPr sz="1200" b="1">
                           <a:solidFill>
                             <a:srgbClr val="0F172A"/>
                           </a:solidFill>
@@ -12381,7 +12470,7 @@
                     <a:lstStyle/>
                     <a:p>
                       <a:r>
-                        <a:rPr sz="1300" b="1">
+                        <a:rPr sz="1200" b="1">
                           <a:solidFill>
                             <a:srgbClr val="0F172A"/>
                           </a:solidFill>
@@ -12403,13 +12492,13 @@
                     <a:lstStyle/>
                     <a:p>
                       <a:r>
-                        <a:rPr sz="1300" b="1">
+                        <a:rPr sz="1200" b="1">
                           <a:solidFill>
                             <a:srgbClr val="0F172A"/>
                           </a:solidFill>
                           <a:latin typeface="PT Sans"/>
                         </a:rPr>
-                        <a:t>0,52</a:t>
+                        <a:t>0,48</a:t>
                       </a:r>
                     </a:p>
                   </a:txBody>
@@ -12425,13 +12514,35 @@
                     <a:lstStyle/>
                     <a:p>
                       <a:r>
-                        <a:rPr sz="1300" b="1">
+                        <a:rPr sz="1200" b="1">
                           <a:solidFill>
                             <a:srgbClr val="0F172A"/>
                           </a:solidFill>
                           <a:latin typeface="PT Sans"/>
                         </a:rPr>
-                        <a:t>да, 0,73</a:t>
+                        <a:t>0,30</a:t>
+                      </a:r>
+                    </a:p>
+                  </a:txBody>
+                  <a:tcPr marL="73152" marR="73152" marT="27432" marB="27432">
+                    <a:solidFill>
+                      <a:srgbClr val="FFFFFF"/>
+                    </a:solidFill>
+                  </a:tcPr>
+                </a:tc>
+                <a:tc>
+                  <a:txBody>
+                    <a:bodyPr/>
+                    <a:lstStyle/>
+                    <a:p>
+                      <a:r>
+                        <a:rPr sz="1200" b="1">
+                          <a:solidFill>
+                            <a:srgbClr val="0F172A"/>
+                          </a:solidFill>
+                          <a:latin typeface="PT Sans"/>
+                        </a:rPr>
+                        <a:t>0,0202</a:t>
                       </a:r>
                     </a:p>
                   </a:txBody>
@@ -12480,7 +12591,7 @@
                 </a:solidFill>
                 <a:latin typeface="PT Sans"/>
               </a:rPr>
-              <a:t>Отказ оборудования вызревает неделями: медиана вызревания признаков — 33 суток. Чем шире окно, тем плотнее сигнал.</a:t>
+              <a:t>Отказ оборудования вызревает неделями: медиана вызревания признаков — 29 суток. Чем шире окно, тем плотнее сигнал.</a:t>
             </a:r>
           </a:p>
         </p:txBody>
@@ -12682,7 +12793,7 @@
                 </a:solidFill>
                 <a:latin typeface="PT Sans"/>
               </a:rPr>
-              <a:t>Планирование ремонтов с точностью 0,73. Заявка с обоснованием, сроком и исполнителем — до того, как оборудование встанет.</a:t>
+              <a:t>Голова очереди втрое плотнее: 0,48 против 0,18. Заявка с обоснованием, сроком и исполнителем — до того, как оборудование встанет.</a:t>
             </a:r>
           </a:p>
         </p:txBody>
@@ -12695,8 +12806,8 @@
         </p:nvSpPr>
         <p:spPr>
           <a:xfrm>
-            <a:off x="777240" y="6400800"/>
-            <a:ext cx="10637215" cy="457200"/>
+            <a:off x="777240" y="6355080"/>
+            <a:ext cx="10637215" cy="640080"/>
           </a:xfrm>
           <a:prstGeom prst="rect">
             <a:avLst/>
@@ -12721,7 +12832,7 @@
                 </a:solidFill>
                 <a:latin typeface="PT Sans"/>
               </a:rPr>
-              <a:t>Это совпадает с тем, как заказчик сам делит работу: аварийный поток и сервисный поток. Горизонт — настройка, а не константа в коде.</a:t>
+              <a:t>Целевых 0,70 не достигает ни один горизонт, и мы говорим это прямо. Деление на аварийный и сервисный поток — то же, что заказчик проводит сам; горизонт вынесен в настройки.</a:t>
             </a:r>
           </a:p>
         </p:txBody>
